--- a/assets/powerpoints/module-n2-couloirs/B2-le-premier-chiffre-dit-l-etage.pptx
+++ b/assets/powerpoints/module-n2-couloirs/B2-le-premier-chiffre-dit-l-etage.pptx
@@ -8822,7 +8822,43 @@
                 </a:solidFill>
                 <a:latin typeface="Verdana"/>
               </a:rPr>
-              <a:t>On dit le &lt;b&gt;rez-de-chaussée&lt;/b&gt;, jamais « l'étage zéro ». Le &lt;b&gt;premier étage&lt;/b&gt; est déjà un escalier plus haut. C'est une source d'erreur constante pour qui vient d'un pays où le rez-de-chaussée s'appelle le premier étage.</a:t>
+              <a:t>On dit le </a:t>
+            </a:r>
+            <a:r>
+              <a:rPr sz="2000" b="1" i="0">
+                <a:solidFill>
+                  <a:srgbClr val="4B4F52"/>
+                </a:solidFill>
+                <a:latin typeface="Verdana"/>
+              </a:rPr>
+              <a:t>rez-de-chaussée</a:t>
+            </a:r>
+            <a:r>
+              <a:rPr sz="2000" b="0" i="0">
+                <a:solidFill>
+                  <a:srgbClr val="4B4F52"/>
+                </a:solidFill>
+                <a:latin typeface="Verdana"/>
+              </a:rPr>
+              <a:t>, jamais « l'étage zéro ». Le </a:t>
+            </a:r>
+            <a:r>
+              <a:rPr sz="2000" b="1" i="0">
+                <a:solidFill>
+                  <a:srgbClr val="4B4F52"/>
+                </a:solidFill>
+                <a:latin typeface="Verdana"/>
+              </a:rPr>
+              <a:t>premier étage</a:t>
+            </a:r>
+            <a:r>
+              <a:rPr sz="2000" b="0" i="0">
+                <a:solidFill>
+                  <a:srgbClr val="4B4F52"/>
+                </a:solidFill>
+                <a:latin typeface="Verdana"/>
+              </a:rPr>
+              <a:t> est déjà un escalier plus haut. C'est une source d'erreur constante pour qui vient d'un pays où le rez-de-chaussée s'appelle le premier étage.</a:t>
             </a:r>
           </a:p>
         </p:txBody>
@@ -10234,7 +10270,43 @@
                 </a:solidFill>
                 <a:latin typeface="Verdana"/>
               </a:rPr>
-              <a:t>« À » et « le » se collent toujours en &lt;b&gt;au&lt;/b&gt; ; « à » et « les » se collent en &lt;b&gt;aux&lt;/b&gt;. Ce n'est pas une règle de style : les formes séparées n'existent pas en français, et personne ne les dit.</a:t>
+              <a:t>« À » et « le » se collent toujours en </a:t>
+            </a:r>
+            <a:r>
+              <a:rPr sz="2000" b="1" i="0">
+                <a:solidFill>
+                  <a:srgbClr val="4B4F52"/>
+                </a:solidFill>
+                <a:latin typeface="Verdana"/>
+              </a:rPr>
+              <a:t>au</a:t>
+            </a:r>
+            <a:r>
+              <a:rPr sz="2000" b="0" i="0">
+                <a:solidFill>
+                  <a:srgbClr val="4B4F52"/>
+                </a:solidFill>
+                <a:latin typeface="Verdana"/>
+              </a:rPr>
+              <a:t> ; « à » et « les » se collent en </a:t>
+            </a:r>
+            <a:r>
+              <a:rPr sz="2000" b="1" i="0">
+                <a:solidFill>
+                  <a:srgbClr val="4B4F52"/>
+                </a:solidFill>
+                <a:latin typeface="Verdana"/>
+              </a:rPr>
+              <a:t>aux</a:t>
+            </a:r>
+            <a:r>
+              <a:rPr sz="2000" b="0" i="0">
+                <a:solidFill>
+                  <a:srgbClr val="4B4F52"/>
+                </a:solidFill>
+                <a:latin typeface="Verdana"/>
+              </a:rPr>
+              <a:t>. Ce n'est pas une règle de style : les formes séparées n'existent pas en français, et personne ne les dit.</a:t>
             </a:r>
           </a:p>
         </p:txBody>
